--- a/互联网络的设计_汇报/卫星/SPLD/PPT.pptx
+++ b/互联网络的设计_汇报/卫星/SPLD/PPT.pptx
@@ -15769,23 +15769,18 @@
                             <a:t>某个小区 </a:t>
                           </a:r>
                           <a14:m>
-                            <m:oMathPara xmlns:m="http://schemas.openxmlformats.org/officeDocument/2006/math">
-                              <m:oMathParaPr>
-                                <m:jc m:val="centerGroup"/>
-                              </m:oMathParaPr>
-                              <m:oMath xmlns:m="http://schemas.openxmlformats.org/officeDocument/2006/math">
-                                <m:r>
-                                  <m:rPr>
-                                    <m:sty m:val="p"/>
-                                  </m:rPr>
-                                  <a:rPr lang="en-US" altLang="zh-CN" sz="1200">
-                                    <a:latin typeface="Cambria Math" panose="02040503050406030204" pitchFamily="18" charset="0"/>
-                                    <a:cs typeface="Cambria Math" panose="02040503050406030204" pitchFamily="18" charset="0"/>
-                                  </a:rPr>
-                                  <m:t>j</m:t>
-                                </m:r>
-                              </m:oMath>
-                            </m:oMathPara>
+                            <m:oMath xmlns:m="http://schemas.openxmlformats.org/officeDocument/2006/math">
+                              <m:r>
+                                <m:rPr>
+                                  <m:sty m:val="p"/>
+                                </m:rPr>
+                                <a:rPr lang="en-US" altLang="zh-CN" sz="1200">
+                                  <a:latin typeface="Cambria Math" panose="02040503050406030204" pitchFamily="18" charset="0"/>
+                                  <a:cs typeface="Cambria Math" panose="02040503050406030204" pitchFamily="18" charset="0"/>
+                                </a:rPr>
+                                <m:t>j</m:t>
+                              </m:r>
+                            </m:oMath>
                           </a14:m>
                           <a:r>
                             <a:rPr lang="zh-CN" altLang="en-US" sz="1200">
@@ -18309,7 +18304,15 @@
                         <a:ea typeface="微软雅黑" panose="020B0503020204020204" pitchFamily="34" charset="-122"/>
                         <a:cs typeface="Cambria Math" panose="02040503050406030204" pitchFamily="18" charset="0"/>
                       </a:rPr>
-                      <m:t>=6</m:t>
+                      <m:t>=</m:t>
+                    </m:r>
+                    <m:r>
+                      <a:rPr lang="en-US" altLang="zh-CN" sz="1400">
+                        <a:latin typeface="Cambria Math" panose="02040503050406030204" pitchFamily="18" charset="0"/>
+                        <a:ea typeface="微软雅黑" panose="020B0503020204020204" pitchFamily="34" charset="-122"/>
+                        <a:cs typeface="Cambria Math" panose="02040503050406030204" pitchFamily="18" charset="0"/>
+                      </a:rPr>
+                      <m:t>6</m:t>
                     </m:r>
                   </m:oMath>
                 </a14:m>
@@ -19679,8 +19682,8 @@
         </p:nvSpPr>
         <p:spPr>
           <a:xfrm>
-            <a:off x="365125" y="4897120"/>
-            <a:ext cx="1101725" cy="464820"/>
+            <a:off x="306705" y="4897120"/>
+            <a:ext cx="1201420" cy="464820"/>
           </a:xfrm>
           <a:prstGeom prst="rect">
             <a:avLst/>
@@ -19719,21 +19722,7 @@
                 <a:latin typeface="微软雅黑" panose="020B0503020204020204" pitchFamily="34" charset="-122"/>
                 <a:ea typeface="微软雅黑" panose="020B0503020204020204" pitchFamily="34" charset="-122"/>
               </a:rPr>
-              <a:t>时延</a:t>
-            </a:r>
-            <a:r>
-              <a:rPr lang="zh-CN" altLang="en-US" sz="1600" b="1" dirty="0">
-                <a:latin typeface="微软雅黑" panose="020B0503020204020204" pitchFamily="34" charset="-122"/>
-                <a:ea typeface="微软雅黑" panose="020B0503020204020204" pitchFamily="34" charset="-122"/>
-              </a:rPr>
-              <a:t>要求</a:t>
-            </a:r>
-            <a:r>
-              <a:rPr lang="en-US" altLang="zh-CN" sz="2200" b="1" dirty="0">
-                <a:latin typeface="微软雅黑" panose="020B0503020204020204" pitchFamily="34" charset="-122"/>
-                <a:ea typeface="微软雅黑" panose="020B0503020204020204" pitchFamily="34" charset="-122"/>
-              </a:rPr>
-              <a:t> </a:t>
+              <a:t>分期部署与星座调整 </a:t>
             </a:r>
             <a:endParaRPr lang="zh-CN" altLang="en-US" sz="2200" b="1" dirty="0">
               <a:latin typeface="微软雅黑" panose="020B0503020204020204" pitchFamily="34" charset="-122"/>
